--- a/data/employees/EMP056/AST-EMP056-01.pptx
+++ b/data/employees/EMP056/AST-EMP056-01.pptx
@@ -9,6 +9,7 @@
     <p:sldId id="257" r:id="rId8"/>
     <p:sldId id="258" r:id="rId9"/>
     <p:sldId id="259" r:id="rId10"/>
+    <p:sldId id="260" r:id="rId11"/>
   </p:sldIdLst>
   <p:sldSz cx="9144000" cy="6858000" type="screen4x3"/>
   <p:notesSz cx="6858000" cy="9144000"/>
@@ -3098,42 +3099,55 @@
             <a:spLocks noGrp="1"/>
           </p:cNvSpPr>
           <p:nvPr>
-            <p:ph type="ctrTitle"/>
-          </p:nvPr>
-        </p:nvSpPr>
-        <p:spPr/>
-        <p:txBody>
-          <a:bodyPr/>
-          <a:lstStyle/>
-          <a:p>
-            <a:r>
-              <a:t>Project update deck - EMP056</a:t>
-            </a:r>
-          </a:p>
-        </p:txBody>
-      </p:sp>
-      <p:sp>
-        <p:nvSpPr>
-          <p:cNvPr id="3" name="Subtitle 2"/>
-          <p:cNvSpPr>
-            <a:spLocks noGrp="1"/>
-          </p:cNvSpPr>
-          <p:nvPr>
-            <p:ph type="subTitle" idx="1"/>
-          </p:nvPr>
-        </p:nvSpPr>
-        <p:spPr/>
-        <p:txBody>
-          <a:bodyPr/>
-          <a:lstStyle/>
-          <a:p>
-            <a:r>
-              <a:t>Avery Wilson | Engineer | Engineering</a:t>
-            </a:r>
-          </a:p>
-          <a:p>
-            <a:r>
-              <a:t>Prepared: 2025-02-27</a:t>
+            <p:ph type="title"/>
+          </p:nvPr>
+        </p:nvSpPr>
+        <p:spPr/>
+        <p:txBody>
+          <a:bodyPr/>
+          <a:lstStyle/>
+          <a:p>
+            <a:r>
+              <a:t>Ast Emp056 01 - EMP056</a:t>
+            </a:r>
+          </a:p>
+        </p:txBody>
+      </p:sp>
+      <p:sp>
+        <p:nvSpPr>
+          <p:cNvPr id="3" name="Content Placeholder 2"/>
+          <p:cNvSpPr>
+            <a:spLocks noGrp="1"/>
+          </p:cNvSpPr>
+          <p:nvPr>
+            <p:ph idx="1"/>
+          </p:nvPr>
+        </p:nvSpPr>
+        <p:spPr/>
+        <p:txBody>
+          <a:bodyPr/>
+          <a:lstStyle/>
+          <a:p>
+            <a:r>
+              <a:t>Slide 1: Executive Summary</a:t>
+            </a:r>
+          </a:p>
+          <a:p>
+            <a:pPr lvl="1"/>
+            <a:r>
+              <a:t>Section 1: Automation backlog refinement. EMP056 contributes to ast emp056 01 through recurring collaboration, clear ownership boundaries, and measurable outcomes. The team captures decisions, open issues, and handoffs so that knowledge remains discoverable for future programs.</a:t>
+            </a:r>
+          </a:p>
+          <a:p>
+            <a:pPr lvl="1"/>
+            <a:r>
+              <a:t>Section 2: Customer escalation analysis. EMP056 contributes to ast emp056 01 through recurring collaboration, clear ownership boundaries, and measurable outcomes. The team captures decisions, open issues, and handoffs so that knowledge remains discoverable for future programs.</a:t>
+            </a:r>
+          </a:p>
+          <a:p>
+            <a:pPr lvl="1"/>
+            <a:r>
+              <a:t>Section 3: Customer escalation analysis. EMP056 contributes to ast emp056 01 through recurring collaboration, clear ownership boundaries, and measurable outcomes. The team captures decisions, open issues, and handoffs so that knowledge remains discoverable for future programs.</a:t>
             </a:r>
           </a:p>
         </p:txBody>
@@ -3172,7 +3186,7 @@
           <a:lstStyle/>
           <a:p>
             <a:r>
-              <a:t>Sprint Velocity Trends</a:t>
+              <a:t>Ast Emp056 01 - EMP056</a:t>
             </a:r>
           </a:p>
         </p:txBody>
@@ -3193,17 +3207,25 @@
           <a:lstStyle/>
           <a:p>
             <a:r>
-              <a:t>Overview of Sprint Velocity Trends for Engineering department.</a:t>
-            </a:r>
-          </a:p>
-          <a:p>
-            <a:r>
-              <a:t>Responsible: Avery Wilson (Engineer)</a:t>
-            </a:r>
-          </a:p>
-          <a:p>
-            <a:r>
-              <a:t>Location: Austin | Skills: SQL, Fabric, Kusto, Azure AI</a:t>
+              <a:t>Slide 2: Executive Summary</a:t>
+            </a:r>
+          </a:p>
+          <a:p>
+            <a:pPr lvl="1"/>
+            <a:r>
+              <a:t>Section 1: Customer escalation analysis. EMP056 contributes to ast emp056 01 through recurring collaboration, clear ownership boundaries, and measurable outcomes. The team captures decisions, open issues, and handoffs so that knowledge remains discoverable for future programs.</a:t>
+            </a:r>
+          </a:p>
+          <a:p>
+            <a:pPr lvl="1"/>
+            <a:r>
+              <a:t>Section 2: Fabric semantic model planning. EMP056 contributes to ast emp056 01 through recurring collaboration, clear ownership boundaries, and measurable outcomes. The team captures decisions, open issues, and handoffs so that knowledge remains discoverable for future programs.</a:t>
+            </a:r>
+          </a:p>
+          <a:p>
+            <a:pPr lvl="1"/>
+            <a:r>
+              <a:t>Section 3: Automation backlog refinement. EMP056 contributes to ast emp056 01 through recurring collaboration, clear ownership boundaries, and measurable outcomes. The team captures decisions, open issues, and handoffs so that knowledge remains discoverable for future programs.</a:t>
             </a:r>
           </a:p>
         </p:txBody>
@@ -3242,7 +3264,7 @@
           <a:lstStyle/>
           <a:p>
             <a:r>
-              <a:t>Technical Debt Dashboard</a:t>
+              <a:t>Ast Emp056 01 - EMP056</a:t>
             </a:r>
           </a:p>
         </p:txBody>
@@ -3263,17 +3285,25 @@
           <a:lstStyle/>
           <a:p>
             <a:r>
-              <a:t>Overview of Technical Debt Dashboard for Engineering department.</a:t>
-            </a:r>
-          </a:p>
-          <a:p>
-            <a:r>
-              <a:t>Responsible: Avery Wilson (Engineer)</a:t>
-            </a:r>
-          </a:p>
-          <a:p>
-            <a:r>
-              <a:t>Location: Austin | Skills: SQL, Fabric, Kusto, Azure AI</a:t>
+              <a:t>Slide 3: Executive Summary</a:t>
+            </a:r>
+          </a:p>
+          <a:p>
+            <a:pPr lvl="1"/>
+            <a:r>
+              <a:t>Section 1: Fabric semantic model planning. EMP056 contributes to ast emp056 01 through recurring collaboration, clear ownership boundaries, and measurable outcomes. The team captures decisions, open issues, and handoffs so that knowledge remains discoverable for future programs.</a:t>
+            </a:r>
+          </a:p>
+          <a:p>
+            <a:pPr lvl="1"/>
+            <a:r>
+              <a:t>Section 2: Knowledge transfer and onboarding. EMP056 contributes to ast emp056 01 through recurring collaboration, clear ownership boundaries, and measurable outcomes. The team captures decisions, open issues, and handoffs so that knowledge remains discoverable for future programs.</a:t>
+            </a:r>
+          </a:p>
+          <a:p>
+            <a:pPr lvl="1"/>
+            <a:r>
+              <a:t>Section 3: Department KPI performance. EMP056 contributes to ast emp056 01 through recurring collaboration, clear ownership boundaries, and measurable outcomes. The team captures decisions, open issues, and handoffs so that knowledge remains discoverable for future programs.</a:t>
             </a:r>
           </a:p>
         </p:txBody>
@@ -3312,7 +3342,7 @@
           <a:lstStyle/>
           <a:p>
             <a:r>
-              <a:t>Architecture Review Outcomes</a:t>
+              <a:t>Ast Emp056 01 - EMP056</a:t>
             </a:r>
           </a:p>
         </p:txBody>
@@ -3333,17 +3363,103 @@
           <a:lstStyle/>
           <a:p>
             <a:r>
-              <a:t>Overview of Architecture Review Outcomes for Engineering department.</a:t>
-            </a:r>
-          </a:p>
-          <a:p>
-            <a:r>
-              <a:t>Responsible: Avery Wilson (Engineer)</a:t>
-            </a:r>
-          </a:p>
-          <a:p>
-            <a:r>
-              <a:t>Location: Austin | Skills: SQL, Fabric, Kusto, Azure AI</a:t>
+              <a:t>Slide 4: Executive Summary</a:t>
+            </a:r>
+          </a:p>
+          <a:p>
+            <a:pPr lvl="1"/>
+            <a:r>
+              <a:t>Section 1: Automation backlog refinement. EMP056 contributes to ast emp056 01 through recurring collaboration, clear ownership boundaries, and measurable outcomes. The team captures decisions, open issues, and handoffs so that knowledge remains discoverable for future programs.</a:t>
+            </a:r>
+          </a:p>
+          <a:p>
+            <a:pPr lvl="1"/>
+            <a:r>
+              <a:t>Section 2: Knowledge transfer and onboarding. EMP056 contributes to ast emp056 01 through recurring collaboration, clear ownership boundaries, and measurable outcomes. The team captures decisions, open issues, and handoffs so that knowledge remains discoverable for future programs.</a:t>
+            </a:r>
+          </a:p>
+          <a:p>
+            <a:pPr lvl="1"/>
+            <a:r>
+              <a:t>Section 3: Data quality remediation. EMP056 contributes to ast emp056 01 through recurring collaboration, clear ownership boundaries, and measurable outcomes. The team captures decisions, open issues, and handoffs so that knowledge remains discoverable for future programs.</a:t>
+            </a:r>
+          </a:p>
+        </p:txBody>
+      </p:sp>
+    </p:spTree>
+  </p:cSld>
+  <p:clrMapOvr>
+    <a:masterClrMapping/>
+  </p:clrMapOvr>
+</p:sld>
+</file>
+
+<file path=ppt/slides/slide5.xml><?xml version="1.0" encoding="utf-8"?>
+<p:sld xmlns:a="http://schemas.openxmlformats.org/drawingml/2006/main" xmlns:p="http://schemas.openxmlformats.org/presentationml/2006/main" xmlns:r="http://schemas.openxmlformats.org/officeDocument/2006/relationships">
+  <p:cSld>
+    <p:spTree>
+      <p:nvGrpSpPr>
+        <p:cNvPr id="1" name=""/>
+        <p:cNvGrpSpPr/>
+        <p:nvPr/>
+      </p:nvGrpSpPr>
+      <p:grpSpPr/>
+      <p:sp>
+        <p:nvSpPr>
+          <p:cNvPr id="2" name="Title 1"/>
+          <p:cNvSpPr>
+            <a:spLocks noGrp="1"/>
+          </p:cNvSpPr>
+          <p:nvPr>
+            <p:ph type="title"/>
+          </p:nvPr>
+        </p:nvSpPr>
+        <p:spPr/>
+        <p:txBody>
+          <a:bodyPr/>
+          <a:lstStyle/>
+          <a:p>
+            <a:r>
+              <a:t>Ast Emp056 01 - EMP056</a:t>
+            </a:r>
+          </a:p>
+        </p:txBody>
+      </p:sp>
+      <p:sp>
+        <p:nvSpPr>
+          <p:cNvPr id="3" name="Content Placeholder 2"/>
+          <p:cNvSpPr>
+            <a:spLocks noGrp="1"/>
+          </p:cNvSpPr>
+          <p:nvPr>
+            <p:ph idx="1"/>
+          </p:nvPr>
+        </p:nvSpPr>
+        <p:spPr/>
+        <p:txBody>
+          <a:bodyPr/>
+          <a:lstStyle/>
+          <a:p>
+            <a:r>
+              <a:t>Slide 5: Executive Summary</a:t>
+            </a:r>
+          </a:p>
+          <a:p>
+            <a:pPr lvl="1"/>
+            <a:r>
+              <a:t>Section 1: Knowledge transfer and onboarding. EMP056 contributes to ast emp056 01 through recurring collaboration, clear ownership boundaries, and measurable outcomes. The team captures decisions, open issues, and handoffs so that knowledge remains discoverable for future programs.</a:t>
+            </a:r>
+          </a:p>
+          <a:p>
+            <a:pPr lvl="1"/>
+            <a:r>
+              <a:t>Section 2: Fabric semantic model planning. EMP056 contributes to ast emp056 01 through recurring collaboration, clear ownership boundaries, and measurable outcomes. The team captures decisions, open issues, and handoffs so that knowledge remains discoverable for future programs.</a:t>
+            </a:r>
+          </a:p>
+          <a:p>
+            <a:pPr lvl="1"/>
+            <a:r>
+              <a:t>Section 3: Knowledge transfer and onboarding. EMP056 contributes to ast emp056 01 through recurring collaboration, clear ownership boundaries, and measurable outcomes. The team captures decisions, open issues, and handoffs so that knowledge remains discoverable for future programs.</a:t>
             </a:r>
           </a:p>
         </p:txBody>
